--- a/sprint-9/Task2/nairobi-slide.pptx
+++ b/sprint-9/Task2/nairobi-slide.pptx
@@ -2,13 +2,13 @@
 <file path=ppt/presentation.xml><?xml version="1.0" encoding="utf-8"?>
 <p:presentation xmlns:p="http://schemas.openxmlformats.org/presentationml/2006/main">
   <p:sldMasterIdLst>
-    <p:sldMasterId xmlns:r="http://schemas.openxmlformats.org/officeDocument/2006/relationships" id="2147483648" r:id="R3b83f93a53884817"/>
+    <p:sldMasterId xmlns:r="http://schemas.openxmlformats.org/officeDocument/2006/relationships" id="2147483648" r:id="R1b2f46699dbe428a"/>
   </p:sldMasterIdLst>
   <p:notesMasterIdLst>
-    <p:notesMasterId xmlns:r="http://schemas.openxmlformats.org/officeDocument/2006/relationships" r:id="R82df0e0198904497"/>
+    <p:notesMasterId xmlns:r="http://schemas.openxmlformats.org/officeDocument/2006/relationships" r:id="R4012cd6d78224293"/>
   </p:notesMasterIdLst>
   <p:sldIdLst>
-    <p:sldId xmlns:r="http://schemas.openxmlformats.org/officeDocument/2006/relationships" id="256" r:id="R50c6e3ff8f09480e"/>
+    <p:sldId xmlns:r="http://schemas.openxmlformats.org/officeDocument/2006/relationships" id="256" r:id="R1eded23b0cdb44e2"/>
   </p:sldIdLst>
   <p:sldSz cx="12192000" cy="6858000"/>
   <p:notesSz cx="6858000" cy="9144000"/>
@@ -442,7 +442,7 @@
           <a:lstStyle xmlns:a="http://schemas.openxmlformats.org/drawingml/2006/main"/>
           <a:p xmlns:a="http://schemas.openxmlformats.org/drawingml/2006/main">
             <a:r>
-              <a:t>Основание: Task1/architecture-canvas.md; артефакты 5 и 6; Task2/options-comparison.md; Task2/tco-model.xlsx, лист Сравнение. Все суммы оценочные. TCO: 5 лет эксплуатации плюс подготовка, резерв 10%, простой выключен. Комиссия 2% all-in требует договора. Транскрипт: Task2/nairobi-script.md. На старте 5000 заказов/мес., М12 50000. При старте разработки 20 сентября восьми недель до 15 октября нет: требуется ограниченный пилот или пересмотр scope/даты.</a:t>
+              <a:t>Источник: Task2/options-comparison.md, разделы «A: облачные ресурсы и полная смета» и «Итоговое сравнение стоимости и сроков». При 5000 заказов/мес.: инфраструктура и SaaS с резервом 20% — $6474,70; интеграции — $3261,67; всего $9736,37, на слайде округлено. С дежурствами $2400 — $12136,37 до базового ФОТ. WAF не включён: ещё $500 × 1,2 = $600/мес. Лимит $5000 относится к инфраструктуре и SaaS. Пятилетний TCO и стоимость заказа прежней модели требуют согласования с детальной сметой. Сроки предполагают полное окно разработки. Транскрипт: Task2/nairobi-script.md.</a:t>
             </a:r>
           </a:p>
         </p:txBody>
@@ -510,7 +510,7 @@
   </p:cSld>
   <p:clrMap bg1="lt1" tx1="dk1" bg2="lt2" tx2="dk2" accent1="accent1" accent2="accent2" accent3="accent3" accent4="accent4" accent5="accent5" accent6="accent6" hlink="hlink" folHlink="folHlink"/>
   <p:sldLayoutIdLst>
-    <p:sldLayoutId xmlns:r="http://schemas.openxmlformats.org/officeDocument/2006/relationships" id="2147483649" r:id="R2552f7dae8724b87"/>
+    <p:sldLayoutId xmlns:r="http://schemas.openxmlformats.org/officeDocument/2006/relationships" id="2147483649" r:id="Rf481fa7d35b94de5"/>
   </p:sldLayoutIdLst>
   <p:txStyles>
     <p:titleStyle>
@@ -1058,7 +1058,7 @@
       </p:grpSpPr>
       <p:sp>
         <p:nvSpPr>
-          <p:cNvPr id="14" name="">
+          <p:cNvPr id="14" name="Rectangle 13">
             <a:extLst xmlns:a="http://schemas.openxmlformats.org/drawingml/2006/main">
               <a:ext uri="{FF2B5EF4-FFF2-40B4-BE49-F238E27FC236}">
                 <a16:creationId xmlns:a16="http://schemas.microsoft.com/office/drawing/2014/main" id="{1357CDEE-12BB-4124-A9D0-C7E84707E879}"/>
@@ -1090,6 +1090,7 @@
           <a:lstStyle xmlns:a="http://schemas.openxmlformats.org/drawingml/2006/main"/>
           <a:p xmlns:a="http://schemas.openxmlformats.org/drawingml/2006/main">
             <a:pPr>
+              <a:buNone/>
               <a:defRPr sz="3150" b="1">
                 <a:solidFill>
                   <a:srgbClr val="17334D"/>
@@ -1115,7 +1116,7 @@
       </p:sp>
       <p:sp>
         <p:nvSpPr>
-          <p:cNvPr id="2" name="">
+          <p:cNvPr id="2" name="Rectangle 1">
             <a:extLst xmlns:a="http://schemas.openxmlformats.org/drawingml/2006/main">
               <a:ext uri="{FF2B5EF4-FFF2-40B4-BE49-F238E27FC236}">
                 <a16:creationId xmlns:a16="http://schemas.microsoft.com/office/drawing/2014/main" id="{796C178C-F426-44F5-A9B5-2430AA6DC51E}"/>
@@ -1147,6 +1148,7 @@
           <a:lstStyle xmlns:a="http://schemas.openxmlformats.org/drawingml/2006/main"/>
           <a:p xmlns:a="http://schemas.openxmlformats.org/drawingml/2006/main">
             <a:pPr>
+              <a:buNone/>
               <a:defRPr sz="2025" b="0">
                 <a:solidFill>
                   <a:srgbClr val="17334D"/>
@@ -1172,7 +1174,7 @@
       </p:sp>
       <p:sp>
         <p:nvSpPr>
-          <p:cNvPr id="3" name="">
+          <p:cNvPr id="3" name="Rectangle 2">
             <a:extLst xmlns:a="http://schemas.openxmlformats.org/drawingml/2006/main">
               <a:ext uri="{FF2B5EF4-FFF2-40B4-BE49-F238E27FC236}">
                 <a16:creationId xmlns:a16="http://schemas.microsoft.com/office/drawing/2014/main" id="{19D9D295-203C-466F-A654-80A86A2504BD}"/>
@@ -1204,6 +1206,7 @@
           <a:lstStyle xmlns:a="http://schemas.openxmlformats.org/drawingml/2006/main"/>
           <a:p xmlns:a="http://schemas.openxmlformats.org/drawingml/2006/main">
             <a:pPr>
+              <a:buNone/>
               <a:defRPr sz="2700" b="1">
                 <a:solidFill>
                   <a:srgbClr val="126D5A"/>
@@ -1229,7 +1232,7 @@
       </p:sp>
       <p:sp>
         <p:nvSpPr>
-          <p:cNvPr id="4" name="">
+          <p:cNvPr id="4" name="Rectangle 3">
             <a:extLst xmlns:a="http://schemas.openxmlformats.org/drawingml/2006/main">
               <a:ext uri="{FF2B5EF4-FFF2-40B4-BE49-F238E27FC236}">
                 <a16:creationId xmlns:a16="http://schemas.microsoft.com/office/drawing/2014/main" id="{BC83525D-5CA6-43F0-A977-4A377E000D81}"/>
@@ -1243,7 +1246,7 @@
         </p:nvSpPr>
         <p:spPr>
           <a:xfrm xmlns:a="http://schemas.openxmlformats.org/drawingml/2006/main">
-            <a:off x="552450" y="2343150"/>
+            <a:off x="552450" y="1981200"/>
             <a:ext cx="5286375" cy="781050"/>
           </a:xfrm>
           <a:prstGeom xmlns:a="http://schemas.openxmlformats.org/drawingml/2006/main" prst="rect">
@@ -1261,6 +1264,7 @@
           <a:lstStyle xmlns:a="http://schemas.openxmlformats.org/drawingml/2006/main"/>
           <a:p xmlns:a="http://schemas.openxmlformats.org/drawingml/2006/main">
             <a:pPr>
+              <a:buNone/>
               <a:defRPr sz="4650" b="1">
                 <a:solidFill>
                   <a:srgbClr val="126D5A"/>
@@ -1279,14 +1283,58 @@
                 <a:ea typeface="Arial"/>
                 <a:cs typeface="Arial"/>
               </a:rPr>
-              <a:t>$4 610 / мес.</a:t>
+              <a:t>$</a:t>
+            </a:r>
+            <a:r>
+              <a:rPr sz="4650" b="1">
+                <a:solidFill>
+                  <a:srgbClr val="126D5A"/>
+                </a:solidFill>
+                <a:latin typeface="Arial"/>
+                <a:ea typeface="Arial"/>
+                <a:cs typeface="Arial"/>
+              </a:rPr>
+              <a:t>9 736 </a:t>
+            </a:r>
+            <a:r>
+              <a:rPr sz="4650" b="1">
+                <a:solidFill>
+                  <a:srgbClr val="126D5A"/>
+                </a:solidFill>
+                <a:latin typeface="Arial"/>
+                <a:ea typeface="Arial"/>
+                <a:cs typeface="Arial"/>
+              </a:rPr>
+              <a:t>/ </a:t>
+            </a:r>
+            <a:r>
+              <a:rPr sz="4650" b="1">
+                <a:solidFill>
+                  <a:srgbClr val="126D5A"/>
+                </a:solidFill>
+                <a:latin typeface="Arial"/>
+                <a:ea typeface="Arial"/>
+                <a:cs typeface="Arial"/>
+              </a:rPr>
+              <a:t>мес</a:t>
+            </a:r>
+            <a:r>
+              <a:rPr sz="4650" b="1">
+                <a:solidFill>
+                  <a:srgbClr val="126D5A"/>
+                </a:solidFill>
+                <a:latin typeface="Arial"/>
+                <a:ea typeface="Arial"/>
+                <a:cs typeface="Arial"/>
+              </a:rPr>
+              <a:t>.</a:t>
             </a:r>
           </a:p>
         </p:txBody>
       </p:sp>
       <p:sp>
         <p:nvSpPr>
-          <p:cNvPr id="5" name="">
+          <p:cNvPr id="5" name="Rectangle 4">
             <a:extLst xmlns:a="http://schemas.openxmlformats.org/drawingml/2006/main">
               <a:ext uri="{FF2B5EF4-FFF2-40B4-BE49-F238E27FC236}">
                 <a16:creationId xmlns:a16="http://schemas.microsoft.com/office/drawing/2014/main" id="{6A44744E-27AE-4F26-8637-91167801E921}"/>
@@ -1300,8 +1348,8 @@
         </p:nvSpPr>
         <p:spPr>
           <a:xfrm xmlns:a="http://schemas.openxmlformats.org/drawingml/2006/main">
-            <a:off x="581025" y="3209925"/>
-            <a:ext cx="5476875" cy="628650"/>
+            <a:off x="571500" y="2759074"/>
+            <a:ext cx="5867400" cy="1279525"/>
           </a:xfrm>
           <a:prstGeom xmlns:a="http://schemas.openxmlformats.org/drawingml/2006/main" prst="rect">
             <a:avLst/>
@@ -1318,6 +1366,7 @@
           <a:lstStyle xmlns:a="http://schemas.openxmlformats.org/drawingml/2006/main"/>
           <a:p xmlns:a="http://schemas.openxmlformats.org/drawingml/2006/main">
             <a:pPr>
+              <a:buNone/>
               <a:defRPr sz="1875" b="0">
                 <a:solidFill>
                   <a:srgbClr val="17334D"/>
@@ -1328,7 +1377,7 @@
               </a:defRPr>
             </a:pPr>
             <a:r>
-              <a:rPr sz="1875" b="0">
+              <a:rPr sz="1875">
                 <a:solidFill>
                   <a:srgbClr val="17334D"/>
                 </a:solidFill>
@@ -1336,11 +1385,12 @@
                 <a:ea typeface="Arial"/>
                 <a:cs typeface="Arial"/>
               </a:rPr>
-              <a:t>при 5 тыс. заказов, включая комиссии</a:t>
+              <a:t>При 5 тыс. заказов:</a:t>
             </a:r>
           </a:p>
           <a:p xmlns:a="http://schemas.openxmlformats.org/drawingml/2006/main">
             <a:pPr>
+              <a:buNone/>
               <a:defRPr sz="1875" b="0">
                 <a:solidFill>
                   <a:srgbClr val="17334D"/>
@@ -1351,7 +1401,7 @@
               </a:defRPr>
             </a:pPr>
             <a:r>
-              <a:rPr sz="1875" b="0">
+              <a:rPr sz="1875">
                 <a:solidFill>
                   <a:srgbClr val="17334D"/>
                 </a:solidFill>
@@ -1359,14 +1409,62 @@
                 <a:ea typeface="Arial"/>
                 <a:cs typeface="Arial"/>
               </a:rPr>
-              <a:t>и резерв мощности. Лимит $5 000.</a:t>
+              <a:t>инфраструктура — $6 474,70 с резервом;</a:t>
+            </a:r>
+          </a:p>
+          <a:p xmlns:a="http://schemas.openxmlformats.org/drawingml/2006/main">
+            <a:pPr>
+              <a:buNone/>
+              <a:defRPr sz="1875" b="0">
+                <a:solidFill>
+                  <a:srgbClr val="17334D"/>
+                </a:solidFill>
+                <a:latin typeface="Arial"/>
+                <a:ea typeface="Arial"/>
+                <a:cs typeface="Arial"/>
+              </a:defRPr>
+            </a:pPr>
+            <a:r>
+              <a:rPr sz="1875">
+                <a:solidFill>
+                  <a:srgbClr val="17334D"/>
+                </a:solidFill>
+                <a:latin typeface="Arial"/>
+                <a:ea typeface="Arial"/>
+                <a:cs typeface="Arial"/>
+              </a:rPr>
+              <a:t>интеграции — $3 261,67.</a:t>
+            </a:r>
+          </a:p>
+          <a:p xmlns:a="http://schemas.openxmlformats.org/drawingml/2006/main">
+            <a:pPr>
+              <a:buNone/>
+              <a:defRPr sz="1875" b="0">
+                <a:solidFill>
+                  <a:srgbClr val="17334D"/>
+                </a:solidFill>
+                <a:latin typeface="Arial"/>
+                <a:ea typeface="Arial"/>
+                <a:cs typeface="Arial"/>
+              </a:defRPr>
+            </a:pPr>
+            <a:r>
+              <a:rPr sz="1875">
+                <a:solidFill>
+                  <a:srgbClr val="17334D"/>
+                </a:solidFill>
+                <a:latin typeface="Arial"/>
+                <a:ea typeface="Arial"/>
+                <a:cs typeface="Arial"/>
+              </a:rPr>
+              <a:t>Без ФОТ и компенсации дежурств.</a:t>
             </a:r>
           </a:p>
         </p:txBody>
       </p:sp>
       <p:sp>
         <p:nvSpPr>
-          <p:cNvPr id="6" name="">
+          <p:cNvPr id="6" name="Rectangle 5">
             <a:extLst xmlns:a="http://schemas.openxmlformats.org/drawingml/2006/main">
               <a:ext uri="{FF2B5EF4-FFF2-40B4-BE49-F238E27FC236}">
                 <a16:creationId xmlns:a16="http://schemas.microsoft.com/office/drawing/2014/main" id="{2B8BC507-2717-4BDA-86DA-88710E817A2A}"/>
@@ -1380,7 +1478,7 @@
         </p:nvSpPr>
         <p:spPr>
           <a:xfrm xmlns:a="http://schemas.openxmlformats.org/drawingml/2006/main">
-            <a:off x="6419850" y="2457450"/>
+            <a:off x="6419850" y="2197100"/>
             <a:ext cx="5238750" cy="590550"/>
           </a:xfrm>
           <a:prstGeom xmlns:a="http://schemas.openxmlformats.org/drawingml/2006/main" prst="rect">
@@ -1398,6 +1496,7 @@
           <a:lstStyle xmlns:a="http://schemas.openxmlformats.org/drawingml/2006/main"/>
           <a:p xmlns:a="http://schemas.openxmlformats.org/drawingml/2006/main">
             <a:pPr>
+              <a:buNone/>
               <a:defRPr sz="2775" b="1">
                 <a:solidFill>
                   <a:srgbClr val="17334D"/>
@@ -1416,14 +1515,14 @@
                 <a:ea typeface="Arial"/>
                 <a:cs typeface="Arial"/>
               </a:rPr>
-              <a:t>$8,23 → $1,52 / заказ</a:t>
+              <a:t>+$1 474,70 / мес.</a:t>
             </a:r>
           </a:p>
         </p:txBody>
       </p:sp>
       <p:sp>
         <p:nvSpPr>
-          <p:cNvPr id="7" name="">
+          <p:cNvPr id="7" name="Rectangle 6">
             <a:extLst xmlns:a="http://schemas.openxmlformats.org/drawingml/2006/main">
               <a:ext uri="{FF2B5EF4-FFF2-40B4-BE49-F238E27FC236}">
                 <a16:creationId xmlns:a16="http://schemas.microsoft.com/office/drawing/2014/main" id="{18052F5E-47F8-477F-A9F7-B1F8A46A8CB4}"/>
@@ -1437,7 +1536,7 @@
         </p:nvSpPr>
         <p:spPr>
           <a:xfrm xmlns:a="http://schemas.openxmlformats.org/drawingml/2006/main">
-            <a:off x="6448425" y="3209925"/>
+            <a:off x="6448425" y="2822575"/>
             <a:ext cx="5238750" cy="628650"/>
           </a:xfrm>
           <a:prstGeom xmlns:a="http://schemas.openxmlformats.org/drawingml/2006/main" prst="rect">
@@ -1455,6 +1554,7 @@
           <a:lstStyle xmlns:a="http://schemas.openxmlformats.org/drawingml/2006/main"/>
           <a:p xmlns:a="http://schemas.openxmlformats.org/drawingml/2006/main">
             <a:pPr>
+              <a:buNone/>
               <a:defRPr sz="1875" b="0">
                 <a:solidFill>
                   <a:srgbClr val="17334D"/>
@@ -1473,11 +1573,12 @@
                 <a:ea typeface="Arial"/>
                 <a:cs typeface="Arial"/>
               </a:rPr>
-              <a:t>с ФОТ: запуск → месяц 12</a:t>
+              <a:t>превышение лимита $5 000</a:t>
             </a:r>
           </a:p>
           <a:p xmlns:a="http://schemas.openxmlformats.org/drawingml/2006/main">
             <a:pPr>
+              <a:buNone/>
               <a:defRPr sz="1875" b="0">
                 <a:solidFill>
                   <a:srgbClr val="17334D"/>
@@ -1496,14 +1597,14 @@
                 <a:ea typeface="Arial"/>
                 <a:cs typeface="Arial"/>
               </a:rPr>
-              <a:t>при росте до 50 тыс. заказов / мес.</a:t>
+              <a:t>на инфраструктуру и SaaS</a:t>
             </a:r>
           </a:p>
         </p:txBody>
       </p:sp>
       <p:sp>
         <p:nvSpPr>
-          <p:cNvPr id="8" name="">
+          <p:cNvPr id="8" name="Rectangle 7">
             <a:extLst xmlns:a="http://schemas.openxmlformats.org/drawingml/2006/main">
               <a:ext uri="{FF2B5EF4-FFF2-40B4-BE49-F238E27FC236}">
                 <a16:creationId xmlns:a16="http://schemas.microsoft.com/office/drawing/2014/main" id="{43F5DD24-B2A2-48AC-B0EF-407997D8F667}"/>
@@ -1535,6 +1636,7 @@
           <a:lstStyle xmlns:a="http://schemas.openxmlformats.org/drawingml/2006/main"/>
           <a:p xmlns:a="http://schemas.openxmlformats.org/drawingml/2006/main">
             <a:pPr>
+              <a:buNone/>
               <a:defRPr sz="1875" b="1">
                 <a:solidFill>
                   <a:srgbClr val="17334D"/>
@@ -1553,14 +1655,22 @@
                 <a:ea typeface="Arial"/>
                 <a:cs typeface="Arial"/>
               </a:rPr>
-              <a:t>TCO за 5 лет с ФОТ и резервом</a:t>
-            </a:r>
+              <a:t>Команда и срок подготовки запуска</a:t>
+            </a:r>
+            <a:endParaRPr sz="1875" b="1">
+              <a:solidFill>
+                <a:srgbClr val="17334D"/>
+              </a:solidFill>
+              <a:latin typeface="Arial"/>
+              <a:ea typeface="Arial"/>
+              <a:cs typeface="Arial"/>
+            </a:endParaRPr>
           </a:p>
         </p:txBody>
       </p:sp>
       <p:sp>
         <p:nvSpPr>
-          <p:cNvPr id="9" name="">
+          <p:cNvPr id="9" name="Rectangle 8">
             <a:extLst xmlns:a="http://schemas.openxmlformats.org/drawingml/2006/main">
               <a:ext uri="{FF2B5EF4-FFF2-40B4-BE49-F238E27FC236}">
                 <a16:creationId xmlns:a16="http://schemas.microsoft.com/office/drawing/2014/main" id="{566A4EBD-7462-4768-84FD-B3B50DB8FEDF}"/>
@@ -1592,6 +1702,7 @@
           <a:lstStyle xmlns:a="http://schemas.openxmlformats.org/drawingml/2006/main"/>
           <a:p xmlns:a="http://schemas.openxmlformats.org/drawingml/2006/main">
             <a:pPr>
+              <a:buNone/>
               <a:defRPr sz="1950" b="1">
                 <a:solidFill>
                   <a:srgbClr val="126D5A"/>
@@ -1612,9 +1723,18 @@
               </a:rPr>
               <a:t>A. Монолит</a:t>
             </a:r>
+            <a:endParaRPr sz="1950" b="1">
+              <a:solidFill>
+                <a:srgbClr val="126D5A"/>
+              </a:solidFill>
+              <a:latin typeface="Arial"/>
+              <a:ea typeface="Arial"/>
+              <a:cs typeface="Arial"/>
+            </a:endParaRPr>
           </a:p>
           <a:p xmlns:a="http://schemas.openxmlformats.org/drawingml/2006/main">
             <a:pPr>
+              <a:buNone/>
               <a:defRPr sz="1950" b="1">
                 <a:solidFill>
                   <a:srgbClr val="126D5A"/>
@@ -1633,14 +1753,22 @@
                 <a:ea typeface="Arial"/>
                 <a:cs typeface="Arial"/>
               </a:rPr>
-              <a:t>$22,08 млн · 6 человек</a:t>
-            </a:r>
+              <a:t>6 человек · 8 недель</a:t>
+            </a:r>
+            <a:endParaRPr sz="1950" b="1">
+              <a:solidFill>
+                <a:srgbClr val="126D5A"/>
+              </a:solidFill>
+              <a:latin typeface="Arial"/>
+              <a:ea typeface="Arial"/>
+              <a:cs typeface="Arial"/>
+            </a:endParaRPr>
           </a:p>
         </p:txBody>
       </p:sp>
       <p:sp>
         <p:nvSpPr>
-          <p:cNvPr id="10" name="">
+          <p:cNvPr id="10" name="Rectangle 9">
             <a:extLst xmlns:a="http://schemas.openxmlformats.org/drawingml/2006/main">
               <a:ext uri="{FF2B5EF4-FFF2-40B4-BE49-F238E27FC236}">
                 <a16:creationId xmlns:a16="http://schemas.microsoft.com/office/drawing/2014/main" id="{D9AB26DE-4959-4ADC-B97E-570321916472}"/>
@@ -1672,6 +1800,7 @@
           <a:lstStyle xmlns:a="http://schemas.openxmlformats.org/drawingml/2006/main"/>
           <a:p xmlns:a="http://schemas.openxmlformats.org/drawingml/2006/main">
             <a:pPr>
+              <a:buNone/>
               <a:defRPr sz="1950" b="0">
                 <a:solidFill>
                   <a:srgbClr val="17334D"/>
@@ -1695,6 +1824,7 @@
           </a:p>
           <a:p xmlns:a="http://schemas.openxmlformats.org/drawingml/2006/main">
             <a:pPr>
+              <a:buNone/>
               <a:defRPr sz="1950" b="0">
                 <a:solidFill>
                   <a:srgbClr val="17334D"/>
@@ -1713,14 +1843,14 @@
                 <a:ea typeface="Arial"/>
                 <a:cs typeface="Arial"/>
               </a:rPr>
-              <a:t>$22,95 млн · 8 человек</a:t>
+              <a:t>8 человек · 10–12 недель</a:t>
             </a:r>
           </a:p>
         </p:txBody>
       </p:sp>
       <p:sp>
         <p:nvSpPr>
-          <p:cNvPr id="11" name="">
+          <p:cNvPr id="11" name="Rectangle 10">
             <a:extLst xmlns:a="http://schemas.openxmlformats.org/drawingml/2006/main">
               <a:ext uri="{FF2B5EF4-FFF2-40B4-BE49-F238E27FC236}">
                 <a16:creationId xmlns:a16="http://schemas.microsoft.com/office/drawing/2014/main" id="{A24A720E-158E-43CB-AAD5-A65CA7AEF233}"/>
@@ -1752,6 +1882,7 @@
           <a:lstStyle xmlns:a="http://schemas.openxmlformats.org/drawingml/2006/main"/>
           <a:p xmlns:a="http://schemas.openxmlformats.org/drawingml/2006/main">
             <a:pPr>
+              <a:buNone/>
               <a:defRPr sz="1950" b="0">
                 <a:solidFill>
                   <a:srgbClr val="17334D"/>
@@ -1775,6 +1906,7 @@
           </a:p>
           <a:p xmlns:a="http://schemas.openxmlformats.org/drawingml/2006/main">
             <a:pPr>
+              <a:buNone/>
               <a:defRPr sz="1950" b="0">
                 <a:solidFill>
                   <a:srgbClr val="17334D"/>
@@ -1793,14 +1925,14 @@
                 <a:ea typeface="Arial"/>
                 <a:cs typeface="Arial"/>
               </a:rPr>
-              <a:t>$27,75 млн · 14 человек</a:t>
+              <a:t>14 человек · 24–32 недели</a:t>
             </a:r>
           </a:p>
         </p:txBody>
       </p:sp>
       <p:sp>
         <p:nvSpPr>
-          <p:cNvPr id="12" name="">
+          <p:cNvPr id="12" name="Rectangle 11">
             <a:extLst xmlns:a="http://schemas.openxmlformats.org/drawingml/2006/main">
               <a:ext uri="{FF2B5EF4-FFF2-40B4-BE49-F238E27FC236}">
                 <a16:creationId xmlns:a16="http://schemas.microsoft.com/office/drawing/2014/main" id="{BD965817-E07C-48D6-A669-4EEF0F9D2F94}"/>
@@ -1814,8 +1946,8 @@
         </p:nvSpPr>
         <p:spPr>
           <a:xfrm xmlns:a="http://schemas.openxmlformats.org/drawingml/2006/main">
-            <a:off x="571500" y="5686425"/>
-            <a:ext cx="11096625" cy="371475"/>
+            <a:off x="571500" y="5438775"/>
+            <a:ext cx="11096625" cy="612775"/>
           </a:xfrm>
           <a:prstGeom xmlns:a="http://schemas.openxmlformats.org/drawingml/2006/main" prst="rect">
             <a:avLst/>
@@ -1832,6 +1964,7 @@
           <a:lstStyle xmlns:a="http://schemas.openxmlformats.org/drawingml/2006/main"/>
           <a:p xmlns:a="http://schemas.openxmlformats.org/drawingml/2006/main">
             <a:pPr>
+              <a:buNone/>
               <a:defRPr sz="1800" b="1">
                 <a:solidFill>
                   <a:srgbClr val="17334D"/>
@@ -1842,7 +1975,7 @@
               </a:defRPr>
             </a:pPr>
             <a:r>
-              <a:rPr sz="1800" b="1">
+              <a:rPr b="1">
                 <a:solidFill>
                   <a:srgbClr val="17334D"/>
                 </a:solidFill>
@@ -1850,14 +1983,22 @@
                 <a:ea typeface="Arial"/>
                 <a:cs typeface="Arial"/>
               </a:rPr>
-              <a:t>Утвердить scope и договоры. Кению, свою логистику и Kubernetes отложить.</a:t>
-            </a:r>
+              <a:t>Согласовать бюджет или оптимизировать ресурсы. Кению, свою логистику и Kubernetes отложить.</a:t>
+            </a:r>
+            <a:endParaRPr sz="1800" b="1">
+              <a:solidFill>
+                <a:srgbClr val="17334D"/>
+              </a:solidFill>
+              <a:latin typeface="Arial"/>
+              <a:ea typeface="Arial"/>
+              <a:cs typeface="Arial"/>
+            </a:endParaRPr>
           </a:p>
         </p:txBody>
       </p:sp>
       <p:sp>
         <p:nvSpPr>
-          <p:cNvPr id="13" name="">
+          <p:cNvPr id="13" name="Rectangle 12">
             <a:extLst xmlns:a="http://schemas.openxmlformats.org/drawingml/2006/main">
               <a:ext uri="{FF2B5EF4-FFF2-40B4-BE49-F238E27FC236}">
                 <a16:creationId xmlns:a16="http://schemas.microsoft.com/office/drawing/2014/main" id="{2E168913-E0D2-4274-A033-43D6DC1698ED}"/>
@@ -1889,6 +2030,7 @@
           <a:lstStyle xmlns:a="http://schemas.openxmlformats.org/drawingml/2006/main"/>
           <a:p xmlns:a="http://schemas.openxmlformats.org/drawingml/2006/main">
             <a:pPr>
+              <a:buNone/>
               <a:defRPr sz="1425" b="0">
                 <a:solidFill>
                   <a:srgbClr val="556577"/>
@@ -1907,7 +2049,7 @@
                 <a:ea typeface="Arial"/>
                 <a:cs typeface="Arial"/>
               </a:rPr>
-              <a:t>Плановые оценки. Перевозка и маркетинг вне TCO. Срок требует полного окна разработки.</a:t>
+              <a:t>Оценка без WAF (+$600 с резервом). TCO и стоимость заказа требуют пересчёта.</a:t>
             </a:r>
           </a:p>
         </p:txBody>
